--- a/工作-大圣牌/战棋/下棋局内攻略查询&标记部将优化.pptx
+++ b/工作-大圣牌/战棋/下棋局内攻略查询&标记部将优化.pptx
@@ -5,10 +5,11 @@
     <p:sldMasterId id="2147483648" r:id="rId1"/>
   </p:sldMasterIdLst>
   <p:notesMasterIdLst>
-    <p:notesMasterId r:id="rId3"/>
+    <p:notesMasterId r:id="rId4"/>
   </p:notesMasterIdLst>
   <p:sldIdLst>
     <p:sldId id="256" r:id="rId2"/>
+    <p:sldId id="257" r:id="rId3"/>
   </p:sldIdLst>
   <p:sldSz cx="12192000" cy="6858000"/>
   <p:notesSz cx="6858000" cy="9144000"/>
@@ -142,6 +143,33 @@
 </inkml:ink>
 </file>
 
+<file path=ppt/ink/ink2.xml><?xml version="1.0" encoding="utf-8"?>
+<inkml:ink xmlns:inkml="http://www.w3.org/2003/InkML">
+  <inkml:definitions>
+    <inkml:context xml:id="ctx0">
+      <inkml:inkSource xml:id="inkSrc0">
+        <inkml:traceFormat>
+          <inkml:channel name="X" type="integer" min="-2.14748E9" max="2.14748E9" units="cm"/>
+          <inkml:channel name="Y" type="integer" min="-2.14748E9" max="2.14748E9" units="cm"/>
+          <inkml:channel name="F" type="integer" max="32767" units="dev"/>
+        </inkml:traceFormat>
+        <inkml:channelProperties>
+          <inkml:channelProperty channel="X" name="resolution" value="1000" units="1/cm"/>
+          <inkml:channelProperty channel="Y" name="resolution" value="1000" units="1/cm"/>
+          <inkml:channelProperty channel="F" name="resolution" value="0" units="1/dev"/>
+        </inkml:channelProperties>
+      </inkml:inkSource>
+      <inkml:timestamp xml:id="ts0" timeString="2026-08-15T06:58:42.191"/>
+    </inkml:context>
+    <inkml:brush xml:id="br0">
+      <inkml:brushProperty name="width" value="0.035" units="cm"/>
+      <inkml:brushProperty name="height" value="0.035" units="cm"/>
+    </inkml:brush>
+  </inkml:definitions>
+  <inkml:trace contextRef="#ctx0" brushRef="#br0">0 1 24575,'0'0'-8191</inkml:trace>
+</inkml:ink>
+</file>
+
 <file path=ppt/notesMasters/notesMaster1.xml><?xml version="1.0" encoding="utf-8"?>
 <p:notesMaster xmlns:a="http://schemas.openxmlformats.org/drawingml/2006/main" xmlns:r="http://schemas.openxmlformats.org/officeDocument/2006/relationships" xmlns:p="http://schemas.openxmlformats.org/presentationml/2006/main">
   <p:cSld>
@@ -224,7 +252,7 @@
           <a:p>
             <a:fld id="{9230964B-B4F3-49A3-B752-A7697CEBA9DF}" type="datetimeFigureOut">
               <a:rPr lang="zh-CN" altLang="en-US" smtClean="0"/>
-              <a:t>2026/8/19</a:t>
+              <a:t>2026/9/7</a:t>
             </a:fld>
             <a:endParaRPr lang="zh-CN" altLang="en-US"/>
           </a:p>
@@ -575,6 +603,114 @@
 </p:notes>
 </file>
 
+<file path=ppt/notesSlides/notesSlide2.xml><?xml version="1.0" encoding="utf-8"?>
+<p:notes xmlns:a="http://schemas.openxmlformats.org/drawingml/2006/main" xmlns:r="http://schemas.openxmlformats.org/officeDocument/2006/relationships" xmlns:p="http://schemas.openxmlformats.org/presentationml/2006/main">
+  <p:cSld>
+    <p:spTree>
+      <p:nvGrpSpPr>
+        <p:cNvPr id="1" name="">
+          <a:extLst>
+            <a:ext uri="{FF2B5EF4-FFF2-40B4-BE49-F238E27FC236}">
+              <a16:creationId xmlns:a16="http://schemas.microsoft.com/office/drawing/2014/main" id="{11E5D5BB-58C5-00DA-E73D-98B538E027C0}"/>
+            </a:ext>
+          </a:extLst>
+        </p:cNvPr>
+        <p:cNvGrpSpPr/>
+        <p:nvPr/>
+      </p:nvGrpSpPr>
+      <p:grpSpPr>
+        <a:xfrm>
+          <a:off x="0" y="0"/>
+          <a:ext cx="0" cy="0"/>
+          <a:chOff x="0" y="0"/>
+          <a:chExt cx="0" cy="0"/>
+        </a:xfrm>
+      </p:grpSpPr>
+      <p:sp>
+        <p:nvSpPr>
+          <p:cNvPr id="2" name="幻灯片图像占位符 1">
+            <a:extLst>
+              <a:ext uri="{FF2B5EF4-FFF2-40B4-BE49-F238E27FC236}">
+                <a16:creationId xmlns:a16="http://schemas.microsoft.com/office/drawing/2014/main" id="{9E513190-2750-E63B-2591-1E2652B2EB2E}"/>
+              </a:ext>
+            </a:extLst>
+          </p:cNvPr>
+          <p:cNvSpPr>
+            <a:spLocks noGrp="1" noRot="1" noChangeAspect="1"/>
+          </p:cNvSpPr>
+          <p:nvPr>
+            <p:ph type="sldImg"/>
+          </p:nvPr>
+        </p:nvSpPr>
+        <p:spPr/>
+      </p:sp>
+      <p:sp>
+        <p:nvSpPr>
+          <p:cNvPr id="3" name="备注占位符 2">
+            <a:extLst>
+              <a:ext uri="{FF2B5EF4-FFF2-40B4-BE49-F238E27FC236}">
+                <a16:creationId xmlns:a16="http://schemas.microsoft.com/office/drawing/2014/main" id="{67C5E972-17EF-BB74-5B4E-82E68AE4520F}"/>
+              </a:ext>
+            </a:extLst>
+          </p:cNvPr>
+          <p:cNvSpPr>
+            <a:spLocks noGrp="1"/>
+          </p:cNvSpPr>
+          <p:nvPr>
+            <p:ph type="body" idx="1"/>
+          </p:nvPr>
+        </p:nvSpPr>
+        <p:spPr/>
+        <p:txBody>
+          <a:bodyPr/>
+          <a:lstStyle/>
+          <a:p>
+            <a:endParaRPr lang="zh-CN" altLang="en-US" dirty="0"/>
+          </a:p>
+        </p:txBody>
+      </p:sp>
+      <p:sp>
+        <p:nvSpPr>
+          <p:cNvPr id="4" name="灯片编号占位符 3">
+            <a:extLst>
+              <a:ext uri="{FF2B5EF4-FFF2-40B4-BE49-F238E27FC236}">
+                <a16:creationId xmlns:a16="http://schemas.microsoft.com/office/drawing/2014/main" id="{F880DE74-FB11-8E17-DDC1-EBF5D1928EF3}"/>
+              </a:ext>
+            </a:extLst>
+          </p:cNvPr>
+          <p:cNvSpPr>
+            <a:spLocks noGrp="1"/>
+          </p:cNvSpPr>
+          <p:nvPr>
+            <p:ph type="sldNum" sz="quarter" idx="5"/>
+          </p:nvPr>
+        </p:nvSpPr>
+        <p:spPr/>
+        <p:txBody>
+          <a:bodyPr/>
+          <a:lstStyle/>
+          <a:p>
+            <a:fld id="{97A1E2BB-2DE5-414F-8D5A-F28325309138}" type="slidenum">
+              <a:rPr lang="zh-CN" altLang="en-US" smtClean="0"/>
+              <a:t>2</a:t>
+            </a:fld>
+            <a:endParaRPr lang="zh-CN" altLang="en-US"/>
+          </a:p>
+        </p:txBody>
+      </p:sp>
+    </p:spTree>
+    <p:extLst>
+      <p:ext uri="{BB962C8B-B14F-4D97-AF65-F5344CB8AC3E}">
+        <p14:creationId xmlns:p14="http://schemas.microsoft.com/office/powerpoint/2010/main" val="1398918470"/>
+      </p:ext>
+    </p:extLst>
+  </p:cSld>
+  <p:clrMapOvr>
+    <a:masterClrMapping/>
+  </p:clrMapOvr>
+</p:notes>
+</file>
+
 <file path=ppt/slideLayouts/slideLayout1.xml><?xml version="1.0" encoding="utf-8"?>
 <p:sldLayout xmlns:a="http://schemas.openxmlformats.org/drawingml/2006/main" xmlns:r="http://schemas.openxmlformats.org/officeDocument/2006/relationships" xmlns:p="http://schemas.openxmlformats.org/presentationml/2006/main" type="title" preserve="1">
   <p:cSld name="标题幻灯片">
@@ -722,7 +858,7 @@
           <a:p>
             <a:fld id="{FA298D5E-A4CC-480B-AEC2-6D649322635B}" type="datetimeFigureOut">
               <a:rPr lang="zh-CN" altLang="en-US" smtClean="0"/>
-              <a:t>2026/8/19</a:t>
+              <a:t>2026/9/7</a:t>
             </a:fld>
             <a:endParaRPr lang="zh-CN" altLang="en-US"/>
           </a:p>
@@ -920,7 +1056,7 @@
           <a:p>
             <a:fld id="{FA298D5E-A4CC-480B-AEC2-6D649322635B}" type="datetimeFigureOut">
               <a:rPr lang="zh-CN" altLang="en-US" smtClean="0"/>
-              <a:t>2026/8/19</a:t>
+              <a:t>2026/9/7</a:t>
             </a:fld>
             <a:endParaRPr lang="zh-CN" altLang="en-US"/>
           </a:p>
@@ -1128,7 +1264,7 @@
           <a:p>
             <a:fld id="{FA298D5E-A4CC-480B-AEC2-6D649322635B}" type="datetimeFigureOut">
               <a:rPr lang="zh-CN" altLang="en-US" smtClean="0"/>
-              <a:t>2026/8/19</a:t>
+              <a:t>2026/9/7</a:t>
             </a:fld>
             <a:endParaRPr lang="zh-CN" altLang="en-US"/>
           </a:p>
@@ -1326,7 +1462,7 @@
           <a:p>
             <a:fld id="{FA298D5E-A4CC-480B-AEC2-6D649322635B}" type="datetimeFigureOut">
               <a:rPr lang="zh-CN" altLang="en-US" smtClean="0"/>
-              <a:t>2026/8/19</a:t>
+              <a:t>2026/9/7</a:t>
             </a:fld>
             <a:endParaRPr lang="zh-CN" altLang="en-US"/>
           </a:p>
@@ -1601,7 +1737,7 @@
           <a:p>
             <a:fld id="{FA298D5E-A4CC-480B-AEC2-6D649322635B}" type="datetimeFigureOut">
               <a:rPr lang="zh-CN" altLang="en-US" smtClean="0"/>
-              <a:t>2026/8/19</a:t>
+              <a:t>2026/9/7</a:t>
             </a:fld>
             <a:endParaRPr lang="zh-CN" altLang="en-US"/>
           </a:p>
@@ -1866,7 +2002,7 @@
           <a:p>
             <a:fld id="{FA298D5E-A4CC-480B-AEC2-6D649322635B}" type="datetimeFigureOut">
               <a:rPr lang="zh-CN" altLang="en-US" smtClean="0"/>
-              <a:t>2026/8/19</a:t>
+              <a:t>2026/9/7</a:t>
             </a:fld>
             <a:endParaRPr lang="zh-CN" altLang="en-US"/>
           </a:p>
@@ -2278,7 +2414,7 @@
           <a:p>
             <a:fld id="{FA298D5E-A4CC-480B-AEC2-6D649322635B}" type="datetimeFigureOut">
               <a:rPr lang="zh-CN" altLang="en-US" smtClean="0"/>
-              <a:t>2026/8/19</a:t>
+              <a:t>2026/9/7</a:t>
             </a:fld>
             <a:endParaRPr lang="zh-CN" altLang="en-US"/>
           </a:p>
@@ -2419,7 +2555,7 @@
           <a:p>
             <a:fld id="{FA298D5E-A4CC-480B-AEC2-6D649322635B}" type="datetimeFigureOut">
               <a:rPr lang="zh-CN" altLang="en-US" smtClean="0"/>
-              <a:t>2026/8/19</a:t>
+              <a:t>2026/9/7</a:t>
             </a:fld>
             <a:endParaRPr lang="zh-CN" altLang="en-US"/>
           </a:p>
@@ -2532,7 +2668,7 @@
           <a:p>
             <a:fld id="{FA298D5E-A4CC-480B-AEC2-6D649322635B}" type="datetimeFigureOut">
               <a:rPr lang="zh-CN" altLang="en-US" smtClean="0"/>
-              <a:t>2026/8/19</a:t>
+              <a:t>2026/9/7</a:t>
             </a:fld>
             <a:endParaRPr lang="zh-CN" altLang="en-US"/>
           </a:p>
@@ -2843,7 +2979,7 @@
           <a:p>
             <a:fld id="{FA298D5E-A4CC-480B-AEC2-6D649322635B}" type="datetimeFigureOut">
               <a:rPr lang="zh-CN" altLang="en-US" smtClean="0"/>
-              <a:t>2026/8/19</a:t>
+              <a:t>2026/9/7</a:t>
             </a:fld>
             <a:endParaRPr lang="zh-CN" altLang="en-US"/>
           </a:p>
@@ -3131,7 +3267,7 @@
           <a:p>
             <a:fld id="{FA298D5E-A4CC-480B-AEC2-6D649322635B}" type="datetimeFigureOut">
               <a:rPr lang="zh-CN" altLang="en-US" smtClean="0"/>
-              <a:t>2026/8/19</a:t>
+              <a:t>2026/9/7</a:t>
             </a:fld>
             <a:endParaRPr lang="zh-CN" altLang="en-US"/>
           </a:p>
@@ -3372,7 +3508,7 @@
           <a:p>
             <a:fld id="{FA298D5E-A4CC-480B-AEC2-6D649322635B}" type="datetimeFigureOut">
               <a:rPr lang="zh-CN" altLang="en-US" smtClean="0"/>
-              <a:t>2026/8/19</a:t>
+              <a:t>2026/9/7</a:t>
             </a:fld>
             <a:endParaRPr lang="zh-CN" altLang="en-US"/>
           </a:p>
@@ -3803,7 +3939,7 @@
         </p:nvSpPr>
         <p:spPr>
           <a:xfrm>
-            <a:off x="234315" y="0"/>
+            <a:off x="118381" y="9525"/>
             <a:ext cx="3589444" cy="369332"/>
           </a:xfrm>
           <a:prstGeom prst="rect">
@@ -3829,254 +3965,6 @@
               <a:rPr lang="zh-CN" altLang="en-US" dirty="0"/>
               <a:t>标记部将优化</a:t>
             </a:r>
-          </a:p>
-        </p:txBody>
-      </p:sp>
-      <p:sp>
-        <p:nvSpPr>
-          <p:cNvPr id="10" name="文本框 9">
-            <a:extLst>
-              <a:ext uri="{FF2B5EF4-FFF2-40B4-BE49-F238E27FC236}">
-                <a16:creationId xmlns:a16="http://schemas.microsoft.com/office/drawing/2014/main" id="{49DFAF59-389F-C9D0-75B4-089193C46A49}"/>
-              </a:ext>
-            </a:extLst>
-          </p:cNvPr>
-          <p:cNvSpPr txBox="1"/>
-          <p:nvPr/>
-        </p:nvSpPr>
-        <p:spPr>
-          <a:xfrm>
-            <a:off x="6123884" y="6003142"/>
-            <a:ext cx="5665863" cy="3139321"/>
-          </a:xfrm>
-          <a:prstGeom prst="rect">
-            <a:avLst/>
-          </a:prstGeom>
-          <a:solidFill>
-            <a:schemeClr val="accent2"/>
-          </a:solidFill>
-        </p:spPr>
-        <p:txBody>
-          <a:bodyPr wrap="square" rtlCol="0">
-            <a:spAutoFit/>
-          </a:bodyPr>
-          <a:lstStyle/>
-          <a:p>
-            <a:r>
-              <a:rPr lang="zh-CN" altLang="en-US" dirty="0">
-                <a:solidFill>
-                  <a:schemeClr val="bg1"/>
-                </a:solidFill>
-              </a:rPr>
-              <a:t>局内攻略界面</a:t>
-            </a:r>
-            <a:endParaRPr lang="en-US" altLang="zh-CN" dirty="0">
-              <a:solidFill>
-                <a:schemeClr val="bg1"/>
-              </a:solidFill>
-            </a:endParaRPr>
-          </a:p>
-          <a:p>
-            <a:r>
-              <a:rPr lang="en-US" altLang="zh-CN" dirty="0">
-                <a:solidFill>
-                  <a:schemeClr val="bg1"/>
-                </a:solidFill>
-              </a:rPr>
-              <a:t>1.</a:t>
-            </a:r>
-            <a:r>
-              <a:rPr lang="zh-CN" altLang="en-US" dirty="0">
-                <a:solidFill>
-                  <a:schemeClr val="bg1"/>
-                </a:solidFill>
-              </a:rPr>
-              <a:t>详情改名为阵容，取消全部按钮</a:t>
-            </a:r>
-            <a:endParaRPr lang="en-US" altLang="zh-CN" dirty="0">
-              <a:solidFill>
-                <a:schemeClr val="bg1"/>
-              </a:solidFill>
-            </a:endParaRPr>
-          </a:p>
-          <a:p>
-            <a:r>
-              <a:rPr lang="en-US" altLang="zh-CN" dirty="0">
-                <a:solidFill>
-                  <a:schemeClr val="bg1"/>
-                </a:solidFill>
-              </a:rPr>
-              <a:t>2.</a:t>
-            </a:r>
-            <a:r>
-              <a:rPr lang="zh-CN" altLang="en-US" dirty="0">
-                <a:solidFill>
-                  <a:schemeClr val="bg1"/>
-                </a:solidFill>
-              </a:rPr>
-              <a:t>部将页的喜好</a:t>
-            </a:r>
-            <a:r>
-              <a:rPr lang="en-US" altLang="zh-CN" dirty="0">
-                <a:solidFill>
-                  <a:schemeClr val="bg1"/>
-                </a:solidFill>
-              </a:rPr>
-              <a:t>(</a:t>
-            </a:r>
-            <a:r>
-              <a:rPr lang="zh-CN" altLang="en-US" dirty="0">
-                <a:solidFill>
-                  <a:schemeClr val="bg1"/>
-                </a:solidFill>
-              </a:rPr>
-              <a:t>标记</a:t>
-            </a:r>
-            <a:r>
-              <a:rPr lang="en-US" altLang="zh-CN" dirty="0">
-                <a:solidFill>
-                  <a:schemeClr val="bg1"/>
-                </a:solidFill>
-              </a:rPr>
-              <a:t>)</a:t>
-            </a:r>
-            <a:r>
-              <a:rPr lang="zh-CN" altLang="en-US" dirty="0">
-                <a:solidFill>
-                  <a:schemeClr val="bg1"/>
-                </a:solidFill>
-              </a:rPr>
-              <a:t>功能在</a:t>
-            </a:r>
-            <a:r>
-              <a:rPr lang="zh-CN" altLang="en-US" b="1" dirty="0">
-                <a:solidFill>
-                  <a:schemeClr val="bg1"/>
-                </a:solidFill>
-              </a:rPr>
-              <a:t>打开状态</a:t>
-            </a:r>
-            <a:r>
-              <a:rPr lang="zh-CN" altLang="en-US" dirty="0">
-                <a:solidFill>
-                  <a:schemeClr val="bg1"/>
-                </a:solidFill>
-              </a:rPr>
-              <a:t>下支持选中标记，</a:t>
-            </a:r>
-            <a:r>
-              <a:rPr lang="zh-CN" altLang="en-US" b="1" dirty="0">
-                <a:solidFill>
-                  <a:schemeClr val="bg1"/>
-                </a:solidFill>
-              </a:rPr>
-              <a:t>关闭状态</a:t>
-            </a:r>
-            <a:r>
-              <a:rPr lang="zh-CN" altLang="en-US" dirty="0">
-                <a:solidFill>
-                  <a:schemeClr val="bg1"/>
-                </a:solidFill>
-              </a:rPr>
-              <a:t>下是点击查看详情，且关闭后全部原先的标记状态清空</a:t>
-            </a:r>
-            <a:endParaRPr lang="en-US" altLang="zh-CN" dirty="0">
-              <a:solidFill>
-                <a:schemeClr val="bg1"/>
-              </a:solidFill>
-            </a:endParaRPr>
-          </a:p>
-          <a:p>
-            <a:r>
-              <a:rPr lang="en-US" altLang="zh-CN" dirty="0">
-                <a:solidFill>
-                  <a:schemeClr val="bg1"/>
-                </a:solidFill>
-              </a:rPr>
-              <a:t>3.</a:t>
-            </a:r>
-            <a:r>
-              <a:rPr lang="zh-CN" altLang="en-US" dirty="0">
-                <a:solidFill>
-                  <a:schemeClr val="bg1"/>
-                </a:solidFill>
-              </a:rPr>
-              <a:t>商店中受到标记的部将牌显示优化，在部将牌的头顶处放置一个</a:t>
-            </a:r>
-            <a:r>
-              <a:rPr lang="en-US" altLang="zh-CN" dirty="0">
-                <a:solidFill>
-                  <a:schemeClr val="bg1"/>
-                </a:solidFill>
-              </a:rPr>
-              <a:t>icon</a:t>
-            </a:r>
-            <a:r>
-              <a:rPr lang="zh-CN" altLang="en-US" dirty="0">
-                <a:solidFill>
-                  <a:schemeClr val="bg1"/>
-                </a:solidFill>
-              </a:rPr>
-              <a:t>标记表示这是你要的牌</a:t>
-            </a:r>
-            <a:endParaRPr lang="en-US" altLang="zh-CN" dirty="0">
-              <a:solidFill>
-                <a:schemeClr val="bg1"/>
-              </a:solidFill>
-            </a:endParaRPr>
-          </a:p>
-          <a:p>
-            <a:r>
-              <a:rPr lang="en-US" altLang="zh-CN" dirty="0">
-                <a:solidFill>
-                  <a:schemeClr val="bg1"/>
-                </a:solidFill>
-              </a:rPr>
-              <a:t>4.</a:t>
-            </a:r>
-            <a:r>
-              <a:rPr lang="zh-CN" altLang="en-US" dirty="0">
-                <a:solidFill>
-                  <a:schemeClr val="bg1"/>
-                </a:solidFill>
-              </a:rPr>
-              <a:t>部将页面选中标记后在部将卡牌头顶页增加一个</a:t>
-            </a:r>
-            <a:r>
-              <a:rPr lang="en-US" altLang="zh-CN" dirty="0">
-                <a:solidFill>
-                  <a:schemeClr val="bg1"/>
-                </a:solidFill>
-              </a:rPr>
-              <a:t>icon</a:t>
-            </a:r>
-            <a:r>
-              <a:rPr lang="zh-CN" altLang="en-US" dirty="0">
-                <a:solidFill>
-                  <a:schemeClr val="bg1"/>
-                </a:solidFill>
-              </a:rPr>
-              <a:t>标记表示已标记状态</a:t>
-            </a:r>
-            <a:endParaRPr lang="en-US" altLang="zh-CN" dirty="0">
-              <a:solidFill>
-                <a:schemeClr val="bg1"/>
-              </a:solidFill>
-            </a:endParaRPr>
-          </a:p>
-          <a:p>
-            <a:br>
-              <a:rPr lang="en-US" altLang="zh-CN" dirty="0">
-                <a:solidFill>
-                  <a:schemeClr val="bg1"/>
-                </a:solidFill>
-              </a:rPr>
-            </a:br>
-            <a:endParaRPr lang="zh-CN" altLang="en-US" dirty="0">
-              <a:solidFill>
-                <a:schemeClr val="bg1"/>
-              </a:solidFill>
-            </a:endParaRPr>
           </a:p>
         </p:txBody>
       </p:sp>
@@ -4288,79 +4176,6 @@
           </a:prstGeom>
         </p:spPr>
       </p:pic>
-      <p:pic>
-        <p:nvPicPr>
-          <p:cNvPr id="32" name="图片 31">
-            <a:extLst>
-              <a:ext uri="{FF2B5EF4-FFF2-40B4-BE49-F238E27FC236}">
-                <a16:creationId xmlns:a16="http://schemas.microsoft.com/office/drawing/2014/main" id="{4B245B24-B38D-FE2F-C9FD-FE05877C8050}"/>
-              </a:ext>
-            </a:extLst>
-          </p:cNvPr>
-          <p:cNvPicPr>
-            <a:picLocks noChangeAspect="1"/>
-          </p:cNvPicPr>
-          <p:nvPr/>
-        </p:nvPicPr>
-        <p:blipFill>
-          <a:blip r:embed="rId8"/>
-          <a:stretch>
-            <a:fillRect/>
-          </a:stretch>
-        </p:blipFill>
-        <p:spPr>
-          <a:xfrm>
-            <a:off x="5535756" y="3429000"/>
-            <a:ext cx="5786938" cy="2130721"/>
-          </a:xfrm>
-          <a:prstGeom prst="rect">
-            <a:avLst/>
-          </a:prstGeom>
-        </p:spPr>
-      </p:pic>
-      <p:sp>
-        <p:nvSpPr>
-          <p:cNvPr id="33" name="文本框 32">
-            <a:extLst>
-              <a:ext uri="{FF2B5EF4-FFF2-40B4-BE49-F238E27FC236}">
-                <a16:creationId xmlns:a16="http://schemas.microsoft.com/office/drawing/2014/main" id="{B45224BA-0680-C001-1164-1F5266D5AC90}"/>
-              </a:ext>
-            </a:extLst>
-          </p:cNvPr>
-          <p:cNvSpPr txBox="1"/>
-          <p:nvPr/>
-        </p:nvSpPr>
-        <p:spPr>
-          <a:xfrm>
-            <a:off x="7840066" y="5633810"/>
-            <a:ext cx="1523174" cy="369332"/>
-          </a:xfrm>
-          <a:prstGeom prst="rect">
-            <a:avLst/>
-          </a:prstGeom>
-          <a:noFill/>
-        </p:spPr>
-        <p:txBody>
-          <a:bodyPr wrap="none" rtlCol="0">
-            <a:spAutoFit/>
-          </a:bodyPr>
-          <a:lstStyle/>
-          <a:p>
-            <a:r>
-              <a:rPr lang="zh-CN" altLang="en-US" dirty="0"/>
-              <a:t>局内</a:t>
-            </a:r>
-            <a:r>
-              <a:rPr lang="en-US" altLang="zh-CN" dirty="0"/>
-              <a:t>icon</a:t>
-            </a:r>
-            <a:r>
-              <a:rPr lang="zh-CN" altLang="en-US" dirty="0"/>
-              <a:t>标记</a:t>
-            </a:r>
-          </a:p>
-        </p:txBody>
-      </p:sp>
       <p:sp>
         <p:nvSpPr>
           <p:cNvPr id="2" name="箭头: 右 1">
@@ -4411,6 +4226,339 @@
     <p:extLst>
       <p:ext uri="{BB962C8B-B14F-4D97-AF65-F5344CB8AC3E}">
         <p14:creationId xmlns:p14="http://schemas.microsoft.com/office/powerpoint/2010/main" val="2525861004"/>
+      </p:ext>
+    </p:extLst>
+  </p:cSld>
+  <p:clrMapOvr>
+    <a:masterClrMapping/>
+  </p:clrMapOvr>
+</p:sld>
+</file>
+
+<file path=ppt/slides/slide2.xml><?xml version="1.0" encoding="utf-8"?>
+<p:sld xmlns:a="http://schemas.openxmlformats.org/drawingml/2006/main" xmlns:r="http://schemas.openxmlformats.org/officeDocument/2006/relationships" xmlns:p="http://schemas.openxmlformats.org/presentationml/2006/main">
+  <p:cSld>
+    <p:spTree>
+      <p:nvGrpSpPr>
+        <p:cNvPr id="1" name="">
+          <a:extLst>
+            <a:ext uri="{FF2B5EF4-FFF2-40B4-BE49-F238E27FC236}">
+              <a16:creationId xmlns:a16="http://schemas.microsoft.com/office/drawing/2014/main" id="{7E12972D-D2C5-4621-9648-AE78D383012B}"/>
+            </a:ext>
+          </a:extLst>
+        </p:cNvPr>
+        <p:cNvGrpSpPr/>
+        <p:nvPr/>
+      </p:nvGrpSpPr>
+      <p:grpSpPr>
+        <a:xfrm>
+          <a:off x="0" y="0"/>
+          <a:ext cx="0" cy="0"/>
+          <a:chOff x="0" y="0"/>
+          <a:chExt cx="0" cy="0"/>
+        </a:xfrm>
+      </p:grpSpPr>
+      <p:sp>
+        <p:nvSpPr>
+          <p:cNvPr id="7" name="文本框 6">
+            <a:extLst>
+              <a:ext uri="{FF2B5EF4-FFF2-40B4-BE49-F238E27FC236}">
+                <a16:creationId xmlns:a16="http://schemas.microsoft.com/office/drawing/2014/main" id="{8548C711-CA96-2AFD-C321-FBDD995AC87C}"/>
+              </a:ext>
+            </a:extLst>
+          </p:cNvPr>
+          <p:cNvSpPr txBox="1"/>
+          <p:nvPr/>
+        </p:nvSpPr>
+        <p:spPr>
+          <a:xfrm>
+            <a:off x="118381" y="0"/>
+            <a:ext cx="2896947" cy="369332"/>
+          </a:xfrm>
+          <a:prstGeom prst="rect">
+            <a:avLst/>
+          </a:prstGeom>
+          <a:noFill/>
+        </p:spPr>
+        <p:txBody>
+          <a:bodyPr wrap="none" rtlCol="0">
+            <a:spAutoFit/>
+          </a:bodyPr>
+          <a:lstStyle/>
+          <a:p>
+            <a:r>
+              <a:rPr lang="zh-CN" altLang="en-US" dirty="0"/>
+              <a:t>图鉴</a:t>
+            </a:r>
+            <a:r>
+              <a:rPr lang="en-US" altLang="zh-CN" dirty="0"/>
+              <a:t>&amp;</a:t>
+            </a:r>
+            <a:r>
+              <a:rPr lang="zh-CN" altLang="en-US" dirty="0"/>
+              <a:t>自定义部将添加筛选</a:t>
+            </a:r>
+          </a:p>
+        </p:txBody>
+      </p:sp>
+      <p:sp>
+        <p:nvSpPr>
+          <p:cNvPr id="11" name="文本框 10">
+            <a:extLst>
+              <a:ext uri="{FF2B5EF4-FFF2-40B4-BE49-F238E27FC236}">
+                <a16:creationId xmlns:a16="http://schemas.microsoft.com/office/drawing/2014/main" id="{9727D1EA-8037-35AB-EBFA-AB70ADE6FA1B}"/>
+              </a:ext>
+            </a:extLst>
+          </p:cNvPr>
+          <p:cNvSpPr txBox="1"/>
+          <p:nvPr/>
+        </p:nvSpPr>
+        <p:spPr>
+          <a:xfrm>
+            <a:off x="4032394" y="833664"/>
+            <a:ext cx="184731" cy="369332"/>
+          </a:xfrm>
+          <a:prstGeom prst="rect">
+            <a:avLst/>
+          </a:prstGeom>
+          <a:noFill/>
+        </p:spPr>
+        <p:txBody>
+          <a:bodyPr wrap="none" rtlCol="0">
+            <a:spAutoFit/>
+          </a:bodyPr>
+          <a:lstStyle/>
+          <a:p>
+            <a:endParaRPr lang="zh-CN" altLang="en-US" dirty="0"/>
+          </a:p>
+        </p:txBody>
+      </p:sp>
+      <p:pic>
+        <p:nvPicPr>
+          <p:cNvPr id="3" name="图片 2">
+            <a:extLst>
+              <a:ext uri="{FF2B5EF4-FFF2-40B4-BE49-F238E27FC236}">
+                <a16:creationId xmlns:a16="http://schemas.microsoft.com/office/drawing/2014/main" id="{42D0563D-1D30-0253-F988-26DD40EF1718}"/>
+              </a:ext>
+            </a:extLst>
+          </p:cNvPr>
+          <p:cNvPicPr>
+            <a:picLocks noChangeAspect="1"/>
+          </p:cNvPicPr>
+          <p:nvPr/>
+        </p:nvPicPr>
+        <p:blipFill>
+          <a:blip r:embed="rId3"/>
+          <a:stretch>
+            <a:fillRect/>
+          </a:stretch>
+        </p:blipFill>
+        <p:spPr>
+          <a:xfrm>
+            <a:off x="118381" y="369332"/>
+            <a:ext cx="5034394" cy="2952326"/>
+          </a:xfrm>
+          <a:prstGeom prst="rect">
+            <a:avLst/>
+          </a:prstGeom>
+        </p:spPr>
+      </p:pic>
+      <p:pic>
+        <p:nvPicPr>
+          <p:cNvPr id="6" name="图片 5">
+            <a:extLst>
+              <a:ext uri="{FF2B5EF4-FFF2-40B4-BE49-F238E27FC236}">
+                <a16:creationId xmlns:a16="http://schemas.microsoft.com/office/drawing/2014/main" id="{F10C9B6F-3D07-4DAC-16F0-2BE8CE310FE4}"/>
+              </a:ext>
+            </a:extLst>
+          </p:cNvPr>
+          <p:cNvPicPr>
+            <a:picLocks noChangeAspect="1"/>
+          </p:cNvPicPr>
+          <p:nvPr/>
+        </p:nvPicPr>
+        <p:blipFill>
+          <a:blip r:embed="rId4"/>
+          <a:stretch>
+            <a:fillRect/>
+          </a:stretch>
+        </p:blipFill>
+        <p:spPr>
+          <a:xfrm>
+            <a:off x="5912439" y="426121"/>
+            <a:ext cx="5062270" cy="2838747"/>
+          </a:xfrm>
+          <a:prstGeom prst="rect">
+            <a:avLst/>
+          </a:prstGeom>
+        </p:spPr>
+      </p:pic>
+      <mc:AlternateContent xmlns:mc="http://schemas.openxmlformats.org/markup-compatibility/2006">
+        <mc:Choice xmlns:p14="http://schemas.microsoft.com/office/powerpoint/2010/main" Requires="p14">
+          <p:contentPart p14:bwMode="auto" r:id="rId5">
+            <p14:nvContentPartPr>
+              <p14:cNvPr id="13" name="墨迹 12">
+                <a:extLst>
+                  <a:ext uri="{FF2B5EF4-FFF2-40B4-BE49-F238E27FC236}">
+                    <a16:creationId xmlns:a16="http://schemas.microsoft.com/office/drawing/2014/main" id="{E6987E6D-7E8C-5260-2465-3C158AB5C221}"/>
+                  </a:ext>
+                </a:extLst>
+              </p14:cNvPr>
+              <p14:cNvContentPartPr/>
+              <p14:nvPr/>
+            </p14:nvContentPartPr>
+            <p14:xfrm>
+              <a:off x="9363240" y="2166624"/>
+              <a:ext cx="360" cy="360"/>
+            </p14:xfrm>
+          </p:contentPart>
+        </mc:Choice>
+        <mc:Fallback>
+          <p:pic>
+            <p:nvPicPr>
+              <p:cNvPr id="13" name="墨迹 12">
+                <a:extLst>
+                  <a:ext uri="{FF2B5EF4-FFF2-40B4-BE49-F238E27FC236}">
+                    <a16:creationId xmlns:a16="http://schemas.microsoft.com/office/drawing/2014/main" id="{E6987E6D-7E8C-5260-2465-3C158AB5C221}"/>
+                  </a:ext>
+                </a:extLst>
+              </p:cNvPr>
+              <p:cNvPicPr/>
+              <p:nvPr/>
+            </p:nvPicPr>
+            <p:blipFill>
+              <a:blip r:embed="rId6"/>
+              <a:stretch>
+                <a:fillRect/>
+              </a:stretch>
+            </p:blipFill>
+            <p:spPr>
+              <a:xfrm>
+                <a:off x="9357120" y="2160504"/>
+                <a:ext cx="12600" cy="12600"/>
+              </a:xfrm>
+              <a:prstGeom prst="rect">
+                <a:avLst/>
+              </a:prstGeom>
+            </p:spPr>
+          </p:pic>
+        </mc:Fallback>
+      </mc:AlternateContent>
+      <p:sp>
+        <p:nvSpPr>
+          <p:cNvPr id="26" name="文本框 25">
+            <a:extLst>
+              <a:ext uri="{FF2B5EF4-FFF2-40B4-BE49-F238E27FC236}">
+                <a16:creationId xmlns:a16="http://schemas.microsoft.com/office/drawing/2014/main" id="{EB4A6A42-B522-7E25-1056-A1C6E4297C7A}"/>
+              </a:ext>
+            </a:extLst>
+          </p:cNvPr>
+          <p:cNvSpPr txBox="1"/>
+          <p:nvPr/>
+        </p:nvSpPr>
+        <p:spPr>
+          <a:xfrm>
+            <a:off x="2127190" y="6522917"/>
+            <a:ext cx="1107996" cy="369332"/>
+          </a:xfrm>
+          <a:prstGeom prst="rect">
+            <a:avLst/>
+          </a:prstGeom>
+          <a:noFill/>
+        </p:spPr>
+        <p:txBody>
+          <a:bodyPr wrap="none" rtlCol="0">
+            <a:spAutoFit/>
+          </a:bodyPr>
+          <a:lstStyle/>
+          <a:p>
+            <a:r>
+              <a:rPr lang="zh-CN" altLang="en-US" dirty="0"/>
+              <a:t>打开状态</a:t>
+            </a:r>
+          </a:p>
+        </p:txBody>
+      </p:sp>
+      <p:pic>
+        <p:nvPicPr>
+          <p:cNvPr id="30" name="图片 29">
+            <a:extLst>
+              <a:ext uri="{FF2B5EF4-FFF2-40B4-BE49-F238E27FC236}">
+                <a16:creationId xmlns:a16="http://schemas.microsoft.com/office/drawing/2014/main" id="{2B5C23B5-A011-D4C3-54FC-8C304848DD4E}"/>
+              </a:ext>
+            </a:extLst>
+          </p:cNvPr>
+          <p:cNvPicPr>
+            <a:picLocks noChangeAspect="1"/>
+          </p:cNvPicPr>
+          <p:nvPr/>
+        </p:nvPicPr>
+        <p:blipFill>
+          <a:blip r:embed="rId7"/>
+          <a:stretch>
+            <a:fillRect/>
+          </a:stretch>
+        </p:blipFill>
+        <p:spPr>
+          <a:xfrm>
+            <a:off x="91706" y="3439783"/>
+            <a:ext cx="5061069" cy="3139317"/>
+          </a:xfrm>
+          <a:prstGeom prst="rect">
+            <a:avLst/>
+          </a:prstGeom>
+        </p:spPr>
+      </p:pic>
+      <p:sp>
+        <p:nvSpPr>
+          <p:cNvPr id="2" name="箭头: 右 1">
+            <a:extLst>
+              <a:ext uri="{FF2B5EF4-FFF2-40B4-BE49-F238E27FC236}">
+                <a16:creationId xmlns:a16="http://schemas.microsoft.com/office/drawing/2014/main" id="{E57E7E9A-D3F5-C3F8-6F05-573F0AF97364}"/>
+              </a:ext>
+            </a:extLst>
+          </p:cNvPr>
+          <p:cNvSpPr/>
+          <p:nvPr/>
+        </p:nvSpPr>
+        <p:spPr>
+          <a:xfrm>
+            <a:off x="5046552" y="1603178"/>
+            <a:ext cx="978408" cy="484632"/>
+          </a:xfrm>
+          <a:prstGeom prst="rightArrow">
+            <a:avLst/>
+          </a:prstGeom>
+        </p:spPr>
+        <p:style>
+          <a:lnRef idx="2">
+            <a:schemeClr val="accent1">
+              <a:shade val="15000"/>
+            </a:schemeClr>
+          </a:lnRef>
+          <a:fillRef idx="1">
+            <a:schemeClr val="accent1"/>
+          </a:fillRef>
+          <a:effectRef idx="0">
+            <a:schemeClr val="accent1"/>
+          </a:effectRef>
+          <a:fontRef idx="minor">
+            <a:schemeClr val="lt1"/>
+          </a:fontRef>
+        </p:style>
+        <p:txBody>
+          <a:bodyPr rtlCol="0" anchor="ctr"/>
+          <a:lstStyle/>
+          <a:p>
+            <a:pPr algn="ctr"/>
+            <a:endParaRPr lang="zh-CN" altLang="en-US"/>
+          </a:p>
+        </p:txBody>
+      </p:sp>
+    </p:spTree>
+    <p:extLst>
+      <p:ext uri="{BB962C8B-B14F-4D97-AF65-F5344CB8AC3E}">
+        <p14:creationId xmlns:p14="http://schemas.microsoft.com/office/powerpoint/2010/main" val="3150106185"/>
       </p:ext>
     </p:extLst>
   </p:cSld>
